--- a/dist/초5/수학/분수의성질/초5_수학_분수의성질_03_통분과크기비교.pptx
+++ b/dist/초5/수학/분수의성질/초5_수학_분수의성질_03_통분과크기비교.pptx
@@ -121,13 +121,13 @@
   <p:extLst>
     <p:ext uri="{521415D9-36F7-43E2-AB2F-B90AF26B5E84}">
       <p14:sectionLst xmlns:p14="http://schemas.microsoft.com/office/powerpoint/2010/main">
-        <p14:section name="도입" id="{c3f6a330-13e1-69c8-75b9-949f32634050}">
+        <p14:section name="도입" id="{3acff3ce-098c-7ad8-6ec8-fc84a6a6dcf8}">
           <p14:sldIdLst>
             <p14:sldId id="256"/>
             <p14:sldId id="257"/>
           </p14:sldIdLst>
         </p14:section>
-        <p14:section name="개념" id="{e65daf3f-5967-9783-52ae-b2b7f1518209}">
+        <p14:section name="개념" id="{2f09f778-46a7-be71-9498-5eec75e91f02}">
           <p14:sldIdLst>
             <p14:sldId id="258"/>
             <p14:sldId id="259"/>
@@ -136,32 +136,32 @@
             <p14:sldId id="263"/>
           </p14:sldIdLst>
         </p14:section>
-        <p14:section name="연습" id="{48491a2f-7fc7-9c99-48c9-abfa16857602}">
+        <p14:section name="연습" id="{f03fe810-6724-678d-9d83-1f2025ffbb21}">
           <p14:sldIdLst>
             <p14:sldId id="262"/>
             <p14:sldId id="264"/>
             <p14:sldId id="265"/>
           </p14:sldIdLst>
         </p14:section>
-        <p14:section name="개념" id="{4e53d27e-91c6-954d-6abd-2d684182007c}">
+        <p14:section name="개념" id="{bda61922-a1e2-ec77-adfd-9ca04c864a51}">
           <p14:sldIdLst/>
         </p14:section>
-        <p14:section name="연습" id="{d76067db-d641-f6d7-28e0-45b44b1cae7a}">
+        <p14:section name="연습" id="{e228b578-f03a-d287-c117-64b539b813ba}">
           <p14:sldIdLst/>
         </p14:section>
-        <p14:section name="확인" id="{fc92d5d7-5d7c-0927-2914-716bdbf1ef69}">
+        <p14:section name="확인" id="{072d66fe-6a0e-ee23-78ed-ae3ef6e98361}">
           <p14:sldIdLst>
             <p14:sldId id="266"/>
             <p14:sldId id="267"/>
             <p14:sldId id="268"/>
           </p14:sldIdLst>
         </p14:section>
-        <p14:section name="정리" id="{8f3cf0d6-aa31-ce3c-cf9b-fa20f7aa5564}">
+        <p14:section name="정리" id="{16e2e264-96ed-8828-99a2-aadbbf86599d}">
           <p14:sldIdLst>
             <p14:sldId id="269"/>
           </p14:sldIdLst>
         </p14:section>
-        <p14:section name="보충" id="{b39b7612-29f0-2f81-a95a-bc01764577ff}">
+        <p14:section name="보충" id="{cbe40076-5ddd-26e7-d004-78b0d959beb1}">
           <p14:sldIdLst>
             <p14:sldId id="270"/>
           </p14:sldIdLst>
